--- a/modules/M3-deciding/M3-deciding.pptx
+++ b/modules/M3-deciding/M3-deciding.pptx
@@ -20107,7 +20107,7 @@
           <a:lstStyle/>
           <a:p>
             <a:r>
-              <a:t>Lab 3: ~60 Minutes</a:t>
+              <a:t>Lab 3: ~50 Minutes</a:t>
             </a:r>
           </a:p>
         </p:txBody>

--- a/modules/M3-deciding/M3-deciding.pptx
+++ b/modules/M3-deciding/M3-deciding.pptx
@@ -971,7 +971,7 @@
           <a:p>
             <a:r>
               <a:rPr dirty="0"/>
-              <a:t>~8 min · </a:t>
+              <a:t>~6 min · </a:t>
             </a:r>
             <a:r>
               <a:rPr dirty="0">
@@ -2324,7 +2324,7 @@
           <a:p>
             <a:r>
               <a:rPr dirty="0"/>
-              <a:t>~9 min · </a:t>
+              <a:t>~6 min · </a:t>
             </a:r>
             <a:r>
               <a:rPr dirty="0">
@@ -3657,7 +3657,7 @@
           <a:lstStyle/>
           <a:p>
             <a:r>
-              <a:t>~9 min · </a:t>
+              <a:t>~5 min · </a:t>
             </a:r>
             <a:r>
               <a:rPr>
